--- a/Apresentacao/Apresentacao_esqueleto.pptx
+++ b/Apresentacao/Apresentacao_esqueleto.pptx
@@ -536,7 +536,96 @@
           <a:lstStyle/>
           <a:p>
             <a:r>
-              <a:t>Capa. Preencher orientador e banca — ainda estão como placeholder no dissertacao.tex (pendência já mapeada na avaliação de banca).</a:t>
+              <a:rPr dirty="0"/>
+              <a:t>Capa. </a:t>
+            </a:r>
+            <a:r>
+              <a:rPr dirty="0" err="1"/>
+              <a:t>Preencher</a:t>
+            </a:r>
+            <a:r>
+              <a:rPr dirty="0"/>
+              <a:t> </a:t>
+            </a:r>
+            <a:r>
+              <a:rPr dirty="0" err="1"/>
+              <a:t>orientador</a:t>
+            </a:r>
+            <a:r>
+              <a:rPr dirty="0"/>
+              <a:t> e banca — </a:t>
+            </a:r>
+            <a:r>
+              <a:rPr dirty="0" err="1"/>
+              <a:t>ainda</a:t>
+            </a:r>
+            <a:r>
+              <a:rPr dirty="0"/>
+              <a:t> </a:t>
+            </a:r>
+            <a:r>
+              <a:rPr dirty="0" err="1"/>
+              <a:t>estão</a:t>
+            </a:r>
+            <a:r>
+              <a:rPr dirty="0"/>
+              <a:t> </a:t>
+            </a:r>
+            <a:r>
+              <a:rPr dirty="0" err="1"/>
+              <a:t>como</a:t>
+            </a:r>
+            <a:r>
+              <a:rPr dirty="0"/>
+              <a:t> placeholder no </a:t>
+            </a:r>
+            <a:r>
+              <a:rPr dirty="0" err="1"/>
+              <a:t>dissertacao.tex</a:t>
+            </a:r>
+            <a:r>
+              <a:rPr dirty="0"/>
+              <a:t> (</a:t>
+            </a:r>
+            <a:r>
+              <a:rPr dirty="0" err="1"/>
+              <a:t>pendência</a:t>
+            </a:r>
+            <a:r>
+              <a:rPr dirty="0"/>
+              <a:t> </a:t>
+            </a:r>
+            <a:r>
+              <a:rPr dirty="0" err="1"/>
+              <a:t>já</a:t>
+            </a:r>
+            <a:r>
+              <a:rPr dirty="0"/>
+              <a:t> </a:t>
+            </a:r>
+            <a:r>
+              <a:rPr dirty="0" err="1"/>
+              <a:t>mapeada</a:t>
+            </a:r>
+            <a:r>
+              <a:rPr dirty="0"/>
+              <a:t> </a:t>
+            </a:r>
+            <a:r>
+              <a:rPr dirty="0" err="1"/>
+              <a:t>na</a:t>
+            </a:r>
+            <a:r>
+              <a:rPr dirty="0"/>
+              <a:t> </a:t>
+            </a:r>
+            <a:r>
+              <a:rPr dirty="0" err="1"/>
+              <a:t>avaliação</a:t>
+            </a:r>
+            <a:r>
+              <a:rPr dirty="0"/>
+              <a:t> de banca).</a:t>
             </a:r>
           </a:p>
         </p:txBody>
@@ -13532,42 +13621,6 @@
           </a:p>
         </p:txBody>
       </p:sp>
-      <p:sp>
-        <p:nvSpPr>
-          <p:cNvPr id="6" name="TextBox 5"/>
-          <p:cNvSpPr txBox="1"/>
-          <p:nvPr/>
-        </p:nvSpPr>
-        <p:spPr>
-          <a:xfrm>
-            <a:off x="6253854" y="1241601"/>
-            <a:ext cx="5701436" cy="400000"/>
-          </a:xfrm>
-          <a:prstGeom prst="rect">
-            <a:avLst/>
-          </a:prstGeom>
-          <a:noFill/>
-        </p:spPr>
-        <p:txBody>
-          <a:bodyPr wrap="square">
-            <a:spAutoFit/>
-          </a:bodyPr>
-          <a:lstStyle/>
-          <a:p>
-            <a:pPr marL="0" indent="0">
-              <a:buNone/>
-            </a:pPr>
-            <a:r>
-              <a:rPr sz="1400" b="1">
-                <a:solidFill>
-                  <a:srgbClr val="2F5893"/>
-                </a:solidFill>
-              </a:rPr>
-              <a:t>Tempo médio de envio por classe de tamanho</a:t>
-            </a:r>
-          </a:p>
-        </p:txBody>
-      </p:sp>
       <p:pic>
         <p:nvPicPr>
           <p:cNvPr id="7" name="Picture 6" descr="Experimento_OSTs_banda.png"/>
@@ -13584,32 +13637,8 @@
         </p:blipFill>
         <p:spPr>
           <a:xfrm>
-            <a:off x="199751" y="2235646"/>
-            <a:ext cx="5701436" cy="3536333"/>
-          </a:xfrm>
-          <a:prstGeom prst="rect">
-            <a:avLst/>
-          </a:prstGeom>
-        </p:spPr>
-      </p:pic>
-      <p:pic>
-        <p:nvPicPr>
-          <p:cNvPr id="8" name="Picture 7" descr="Experimento_OSTs.png"/>
-          <p:cNvPicPr>
-            <a:picLocks noChangeAspect="1"/>
-          </p:cNvPicPr>
-          <p:nvPr/>
-        </p:nvPicPr>
-        <p:blipFill>
-          <a:blip r:embed="rId4"/>
-          <a:stretch>
-            <a:fillRect/>
-          </a:stretch>
-        </p:blipFill>
-        <p:spPr>
-          <a:xfrm>
-            <a:off x="6373086" y="1811601"/>
-            <a:ext cx="5462972" cy="4384424"/>
+            <a:off x="1811380" y="1641601"/>
+            <a:ext cx="7766959" cy="4817480"/>
           </a:xfrm>
           <a:prstGeom prst="rect">
             <a:avLst/>
@@ -13816,7 +13845,7 @@
 </file>
 
 <file path=ppt/slides/slide2.xml><?xml version="1.0" encoding="utf-8"?>
-<p:sld xmlns:a="http://schemas.openxmlformats.org/drawingml/2006/main" xmlns:r="http://schemas.openxmlformats.org/officeDocument/2006/relationships" xmlns:p="http://schemas.openxmlformats.org/presentationml/2006/main" show="0">
+<p:sld xmlns:a="http://schemas.openxmlformats.org/drawingml/2006/main" xmlns:r="http://schemas.openxmlformats.org/officeDocument/2006/relationships" xmlns:p="http://schemas.openxmlformats.org/presentationml/2006/main">
   <p:cSld>
     <p:spTree>
       <p:nvGrpSpPr>
